--- a/NOTES/Module 1/module 1 chapter 3.pptx
+++ b/NOTES/Module 1/module 1 chapter 3.pptx
@@ -8237,7 +8237,7 @@
         <p:spPr>
           <a:xfrm>
             <a:off x="2836190" y="3983064"/>
-            <a:ext cx="6617776" cy="2874936"/>
+            <a:ext cx="6404624" cy="2782337"/>
           </a:xfrm>
           <a:prstGeom prst="rect">
             <a:avLst/>

--- a/NOTES/Module 1/module 1 chapter 3.pptx
+++ b/NOTES/Module 1/module 1 chapter 3.pptx
@@ -410,7 +410,7 @@
           <a:p>
             <a:fld id="{69D67600-6670-4D77-9985-3F2005BC0F4D}" type="datetimeFigureOut">
               <a:rPr lang="en-IN" smtClean="0"/>
-              <a:t>01-04-2026</a:t>
+              <a:t>02-04-2026</a:t>
             </a:fld>
             <a:endParaRPr lang="en-IN"/>
           </a:p>
@@ -911,7 +911,7 @@
           <a:p>
             <a:fld id="{20D881F0-2557-4209-8D9C-4CE2631BE05B}" type="datetimeFigureOut">
               <a:rPr lang="en-IN" smtClean="0"/>
-              <a:t>01-04-2026</a:t>
+              <a:t>02-04-2026</a:t>
             </a:fld>
             <a:endParaRPr lang="en-IN"/>
           </a:p>
@@ -1111,7 +1111,7 @@
           <a:p>
             <a:fld id="{20D881F0-2557-4209-8D9C-4CE2631BE05B}" type="datetimeFigureOut">
               <a:rPr lang="en-IN" smtClean="0"/>
-              <a:t>01-04-2026</a:t>
+              <a:t>02-04-2026</a:t>
             </a:fld>
             <a:endParaRPr lang="en-IN"/>
           </a:p>
@@ -1321,7 +1321,7 @@
           <a:p>
             <a:fld id="{20D881F0-2557-4209-8D9C-4CE2631BE05B}" type="datetimeFigureOut">
               <a:rPr lang="en-IN" smtClean="0"/>
-              <a:t>01-04-2026</a:t>
+              <a:t>02-04-2026</a:t>
             </a:fld>
             <a:endParaRPr lang="en-IN"/>
           </a:p>
@@ -1521,7 +1521,7 @@
           <a:p>
             <a:fld id="{20D881F0-2557-4209-8D9C-4CE2631BE05B}" type="datetimeFigureOut">
               <a:rPr lang="en-IN" smtClean="0"/>
-              <a:t>01-04-2026</a:t>
+              <a:t>02-04-2026</a:t>
             </a:fld>
             <a:endParaRPr lang="en-IN"/>
           </a:p>
@@ -1797,7 +1797,7 @@
           <a:p>
             <a:fld id="{20D881F0-2557-4209-8D9C-4CE2631BE05B}" type="datetimeFigureOut">
               <a:rPr lang="en-IN" smtClean="0"/>
-              <a:t>01-04-2026</a:t>
+              <a:t>02-04-2026</a:t>
             </a:fld>
             <a:endParaRPr lang="en-IN"/>
           </a:p>
@@ -2065,7 +2065,7 @@
           <a:p>
             <a:fld id="{20D881F0-2557-4209-8D9C-4CE2631BE05B}" type="datetimeFigureOut">
               <a:rPr lang="en-IN" smtClean="0"/>
-              <a:t>01-04-2026</a:t>
+              <a:t>02-04-2026</a:t>
             </a:fld>
             <a:endParaRPr lang="en-IN"/>
           </a:p>
@@ -2480,7 +2480,7 @@
           <a:p>
             <a:fld id="{20D881F0-2557-4209-8D9C-4CE2631BE05B}" type="datetimeFigureOut">
               <a:rPr lang="en-IN" smtClean="0"/>
-              <a:t>01-04-2026</a:t>
+              <a:t>02-04-2026</a:t>
             </a:fld>
             <a:endParaRPr lang="en-IN"/>
           </a:p>
@@ -2622,7 +2622,7 @@
           <a:p>
             <a:fld id="{20D881F0-2557-4209-8D9C-4CE2631BE05B}" type="datetimeFigureOut">
               <a:rPr lang="en-IN" smtClean="0"/>
-              <a:t>01-04-2026</a:t>
+              <a:t>02-04-2026</a:t>
             </a:fld>
             <a:endParaRPr lang="en-IN"/>
           </a:p>
@@ -2735,7 +2735,7 @@
           <a:p>
             <a:fld id="{20D881F0-2557-4209-8D9C-4CE2631BE05B}" type="datetimeFigureOut">
               <a:rPr lang="en-IN" smtClean="0"/>
-              <a:t>01-04-2026</a:t>
+              <a:t>02-04-2026</a:t>
             </a:fld>
             <a:endParaRPr lang="en-IN"/>
           </a:p>
@@ -3048,7 +3048,7 @@
           <a:p>
             <a:fld id="{20D881F0-2557-4209-8D9C-4CE2631BE05B}" type="datetimeFigureOut">
               <a:rPr lang="en-IN" smtClean="0"/>
-              <a:t>01-04-2026</a:t>
+              <a:t>02-04-2026</a:t>
             </a:fld>
             <a:endParaRPr lang="en-IN"/>
           </a:p>
@@ -3337,7 +3337,7 @@
           <a:p>
             <a:fld id="{20D881F0-2557-4209-8D9C-4CE2631BE05B}" type="datetimeFigureOut">
               <a:rPr lang="en-IN" smtClean="0"/>
-              <a:t>01-04-2026</a:t>
+              <a:t>02-04-2026</a:t>
             </a:fld>
             <a:endParaRPr lang="en-IN"/>
           </a:p>
@@ -3580,7 +3580,7 @@
           <a:p>
             <a:fld id="{20D881F0-2557-4209-8D9C-4CE2631BE05B}" type="datetimeFigureOut">
               <a:rPr lang="en-IN" smtClean="0"/>
-              <a:t>01-04-2026</a:t>
+              <a:t>02-04-2026</a:t>
             </a:fld>
             <a:endParaRPr lang="en-IN"/>
           </a:p>
